--- a/presentation/websockets-201-quarkus/WebSockets_201_Quarkus-r1.1.pptx
+++ b/presentation/websockets-201-quarkus/WebSockets_201_Quarkus-r1.1.pptx
@@ -824,7 +824,7 @@
           <a:p>
             <a:r>
               <a:rPr lang="en-US" dirty="0"/>
-              <a:t>part4-connection forks part3's endpoint and adds the four concerns a single long-lived connection actually needs: who's allowed to open it (Ch17), what happens when it sends faster than the client reads (Ch12), what a client frame outside the contract gets back (Ch13), and how a silently-dead peer gets detected (Ch14). Same channel, same fixture, more guardrails.</a:t>
+              <a:t>part4-connection forks part3's endpoint and adds the four concerns a single long-lived connection actually needs: who's allowed to open it (security), what happens when it sends faster than the client reads (backpressure), what a client frame outside the contract gets back (error handling), and how a silently-dead peer gets detected (liveness). Same channel, same fixture, more guardrails.</a:t>
             </a:r>
             <a:endParaRPr lang="en-US" dirty="0"/>
           </a:p>
@@ -912,7 +912,7 @@
           <a:p>
             <a:r>
               <a:rPr lang="en-US" dirty="0"/>
-              <a:t>Both stacks gain the identical shape: an auth gate at the handshake (Ch17), a guarded outbound path to the fixture replay (Ch12), a reject path for any client frame outside the contract (Ch13, close 4400), and a heartbeat loop pairing an auto-ping with an idle-timeout on Quarkus or ping_interval/ping_timeout on Python (Ch14). Nothing about the public path changes: a well-behaved, authenticated client sees exactly the same three-event replay as part3.</a:t>
+              <a:t>Both stacks gain the identical shape: an auth gate at the handshake (security), a guarded outbound path to the fixture replay (backpressure), a reject path for any client frame outside the contract (error handling, close 4400), and a heartbeat loop pairing an auto-ping with an idle-timeout on Quarkus or ping_interval/ping_timeout on Python (liveness). Nothing about the public path changes: a well-behaved, authenticated client sees exactly the same three-event replay as part3.</a:t>
             </a:r>
             <a:endParaRPr lang="en-US" dirty="0"/>
           </a:p>
@@ -1176,7 +1176,7 @@
           <a:p>
             <a:r>
               <a:rPr lang="en-US" dirty="0"/>
-              <a:t>Push on this distinction if there's time for one question: DROP is in this codebase as a documented trade-off, not a recommendation for this channel. A feed where only the latest value matters (Ch15's stateless-reconnect framing in section 03 makes the same distinction from the other direction) is exactly the shape where DROP is the right call; a feed where every event is a discrete fact never fits it.</a:t>
+              <a:t>Push on this distinction if there's time for one question: DROP is in this codebase as a documented trade-off, not a recommendation for this channel. A feed where only the latest value matters (the stateless-reconnect chapter's framing in section 03 makes the same distinction from the other direction) is exactly the shape where DROP is the right call; a feed where every event is a discrete fact never fits it.</a:t>
             </a:r>
             <a:endParaRPr lang="en-US" dirty="0"/>
           </a:p>
@@ -1440,7 +1440,7 @@
           <a:p>
             <a:r>
               <a:rPr lang="en-US" dirty="0"/>
-              <a:t>The gotcha to dwell on: Vert.x's HTTP idle-timeout resets on any read OR write activity, and the server's own outbound auto-ping is write activity on that same connection: a peer that never answers a single ping never trips idle-timeout, because the server keeps resetting its own clock every auto-ping-interval regardless of whether the peer responds. Confirmed live against this exact example (examples/part4-connection/verify.sh's Ch14 stage): idle-timeout alone cannot distinguish healthy from silently dead once auto-ping is on.</a:t>
+              <a:t>The detail worth dwelling on: Vert.x's HTTP idle-timeout resets on any read OR write activity, and the server's own outbound auto-ping is write activity on that same connection: a peer that never answers a single ping never trips idle-timeout, because the server keeps resetting its own clock every auto-ping-interval regardless of whether the peer responds. Confirmed live against this exact example (examples/part4-connection/verify.sh's liveness stage): idle-timeout alone cannot distinguish healthy from silently dead once auto-ping is on.</a:t>
             </a:r>
             <a:endParaRPr lang="en-US" dirty="0"/>
           </a:p>
@@ -1704,7 +1704,7 @@
           <a:p>
             <a:r>
               <a:rPr lang="en-US" dirty="0"/>
-              <a:t>Closing a WebSocket is itself a two-way handshake: the server sends a close frame and waits for the peer's own close frame before tearing down TCP. A peer this sweep has just proven isn't responding won't send that acknowledgment either, so Vert.x forcibly terminates after its own closing-timeout grace (~10s) elapses; confirmed live: onClose sees the connection's final CloseReason as 1006, not 4408, because the requested close never completed its handshake. That's standard WebSocket behavior for an unresponsive peer, not a bug in the sweep.</a:t>
+              <a:t>Closing a WebSocket is itself a two-way handshake: the server sends a close frame and waits for the peer's own close frame before tearing down TCP. A peer this sweep has just proven isn't responding won't send that acknowledgment either, so Vert.x forcibly terminates after its own closing-timeout grace (~10s) elapses; confirmed live: onClose sees the connection's final CloseReason as 1006, not 4408, because the requested close never completed its handshake. That's standard WebSocket behavior for an unresponsive peer; the sweep is working as designed.</a:t>
             </a:r>
             <a:endParaRPr lang="en-US" dirty="0"/>
           </a:p>
@@ -1968,7 +1968,7 @@
           <a:p>
             <a:r>
               <a:rPr lang="en-US" dirty="0"/>
-              <a:t>part4-backplane moves from one connection to multiple server instances. Stateless mode (Ch15) is the starting baseline: a gap is lost. Kafka (Ch16) makes the gap replayable from afterEventId. Redis (Ch18) buys live fan-out across instances with no replay at all. Same channel, same fixture seed, three delivery strategies selected by one enum.</a:t>
+              <a:t>part4-backplane moves from one connection to multiple server instances. Stateless mode (stateless reconnect) is the starting baseline: a gap is lost. Kafka (Kafka-backed reconnect) makes the gap replayable from afterEventId. Redis (scale-out) buys live fan-out across instances with no replay at all. Same channel, same fixture seed, three delivery strategies selected by one enum.</a:t>
             </a:r>
             <a:endParaRPr lang="en-US" dirty="0"/>
           </a:p>
@@ -2144,7 +2144,7 @@
           <a:p>
             <a:r>
               <a:rPr lang="en-US" dirty="0"/>
-              <a:t>This is the decision this whole section hangs on, stated before any code: a handling-event feed fails the 'stateless is fine' test on all three counts: every event is a discrete billable fact, there's no cheap REST endpoint to re-GET the gap from, and at-least-once delivery matters for an audit trail. That's precisely why Ch16's Kafka-backed mode exists, not because Kafka is the default choice for every WebSocket feed.</a:t>
+              <a:t>This is the decision this whole section hangs on, stated before any code: a handling-event feed fails the 'stateless is fine' test on all three counts: every event is a discrete billable fact, there's no cheap REST endpoint to re-GET the gap from, and at-least-once delivery matters for an audit trail. That's precisely why the Kafka-backed mode exists, not because Kafka is the default choice for every WebSocket feed.</a:t>
             </a:r>
             <a:endParaRPr lang="en-US" dirty="0"/>
           </a:p>
@@ -2232,7 +2232,7 @@
           <a:p>
             <a:r>
               <a:rPr lang="en-US" dirty="0"/>
-              <a:t>This is the Ch15/Ch18 baseline and the default: an injected event reaches only local connections on the instance that received the inject call, never persisted; a client disconnected at injection time loses it permanently. That's the visible gap the Kafka mode (next few slides) is built to close, not a bug in this class.</a:t>
+              <a:t>This is the stateless-reconnect and scale-out baseline and the default: an injected event reaches only local connections on the instance that received the inject call, never persisted; a client disconnected at injection time loses it permanently. That's the visible gap the Kafka mode (next few slides) is built to close; this class is working as designed.</a:t>
             </a:r>
             <a:endParaRPr lang="en-US" dirty="0"/>
           </a:p>
@@ -2320,7 +2320,7 @@
           <a:p>
             <a:r>
               <a:rPr lang="en-US" dirty="0"/>
-              <a:t>The fixture seed is sent separately and unconditionally, outside this replay path: the Kafka topic carries only injected events. That's why a client's afterEventId naming a fixture-seed id (the expected Ch15 gap scenario, right after connecting) always misses the search and replays the entire injected history, rather than replaying nothing: fixture ids never appear in the topic buffer at all.</a:t>
+              <a:t>The fixture seed is sent separately and unconditionally, outside this replay path: the Kafka topic carries only injected events. That's why a client's afterEventId naming a fixture-seed id (the expected stateless-reconnect gap scenario, right after connecting) always misses the search and replays the entire injected history, rather than replaying nothing: fixture ids never appear in the topic buffer at all.</a:t>
             </a:r>
             <a:endParaRPr lang="en-US" dirty="0"/>
           </a:p>
@@ -2408,7 +2408,7 @@
           <a:p>
             <a:r>
               <a:rPr lang="en-US" dirty="0"/>
-              <a:t>mp.messaging.incoming.handling-events-in.group.id is derived from each instance's own INSTANCE_ID, so every instance gets its own consumer group and receives every record: the opposite of the usual shared-group load-balancing pattern, chosen because Ch18's proof needs instance A's client to see an event injected through instance B. auto.offset.reset=earliest means a freshly started instance replays the full topic into memory before any client connects, so replayFor always has the complete picture.</a:t>
+              <a:t>mp.messaging.incoming.handling-events-in.group.id is derived from each instance's own INSTANCE_ID, so every instance gets its own consumer group and receives every record: the opposite of the usual shared-group load-balancing pattern, chosen because the scale-out chapter's proof needs instance A's client to see an event injected through instance B. auto.offset.reset=earliest means a freshly started instance replays the full topic into memory before any client connects, so replayFor always has the complete picture.</a:t>
             </a:r>
             <a:endParaRPr lang="en-US" dirty="0"/>
           </a:p>
@@ -2672,7 +2672,7 @@
           <a:p>
             <a:r>
               <a:rPr lang="en-US" dirty="0"/>
-              <a:t>Kafka: durable, retained on disk, replayable; the same topic that powers Ch16's afterEventId resume, at the cost of topic/partition/offset bookkeeping per instance. Redis: a handling-events:{bookingId} Pub/Sub channel, live fan-out only; a dropped subscriber loses in-flight messages with nothing to catch back up, and afterEventId behaves exactly as stateless mode because there's no history. verify.sh proves identical cross-instance delivery on both; the choice is an operational trade-off, not a correctness one.</a:t>
+              <a:t>Kafka: durable, retained on disk, replayable; the same topic that powers the Kafka-backed reconnect's afterEventId resume, at the cost of topic/partition/offset bookkeeping per instance. Redis: a handling-events:{bookingId} Pub/Sub channel, live fan-out only; a dropped subscriber loses in-flight messages with nothing to catch back up, and afterEventId behaves exactly as stateless mode because there's no history. verify.sh proves identical cross-instance delivery on both; the choice is an operational trade-off, not a correctness one.</a:t>
             </a:r>
             <a:endParaRPr lang="en-US" dirty="0"/>
           </a:p>
@@ -2848,7 +2848,7 @@
           <a:p>
             <a:r>
               <a:rPr lang="en-US" dirty="0"/>
-              <a:t>Not part of contracts/asyncapi.yaml: an internal/demo endpoint, documented in PROTOCOL.md's 'Inject endpoint' section, how tests and the Ch18 proof itself get an event onto the active backplane. Always 202 Accepted: publishing is fire-and-forget from the caller's side, regardless of whether delivery ends up local-only (stateless), durable (Kafka), or live-only (Redis): BackplaneRouter is the one seam that routes to whichever mode application.properties selected.</a:t>
+              <a:t>Not part of contracts/asyncapi.yaml: an internal/demo endpoint, documented in PROTOCOL.md's 'Inject endpoint' section, how tests and the scale-out chapter's proof itself get an event onto the active backplane. Always 202 Accepted: publishing is fire-and-forget from the caller's side, regardless of whether delivery ends up local-only (stateless), durable (Kafka), or live-only (Redis): BackplaneRouter is the one seam that routes to whichever mode application.properties selected.</a:t>
             </a:r>
             <a:endParaRPr lang="en-US" dirty="0"/>
           </a:p>
@@ -2936,7 +2936,7 @@
           <a:p>
             <a:r>
               <a:rPr lang="en-US" dirty="0"/>
-              <a:t>part5-performance adds a choice between JSON and Protobuf, negotiated via Sec-WebSocket-Protocol on the same channel, then walks the throughput levers (encoding, batching, compression, size limits) that sit underneath Chapter 12's backpressure ceiling from section 02.</a:t>
+              <a:t>part5-performance adds a choice between JSON and Protobuf, negotiated via Sec-WebSocket-Protocol on the same channel, then walks the throughput levers (encoding, batching, compression, size limits) that sit underneath the backpressure ceiling from section 02.</a:t>
             </a:r>
             <a:endParaRPr lang="en-US" dirty="0"/>
           </a:p>
@@ -3288,7 +3288,7 @@
           <a:p>
             <a:r>
               <a:rPr lang="en-US" dirty="0"/>
-              <a:t>scripts/check-proto-parity.py fails the build the moment either side adds, removes, or reorders a field the other side doesn't also carry: the same additive-only discipline Chapter 7's JSON contract already enforces, just enforced on a different identity (an integer tag rather than a string key). HandlingEventProtoMapper's own enum-prefix stripping is this same discipline showing up as runtime code: the proto enum's HANDLING_EVENT_TYPE_ prefix has to agree with the bare Java enum on both sides.</a:t>
+              <a:t>scripts/check-proto-parity.py fails the build the moment either side adds, removes, or reorders a field the other side doesn't also carry: the same additive-only discipline the versioning-and-evolution chapter's JSON contract already enforces, just enforced on a different identity (an integer tag rather than a string key). HandlingEventProtoMapper's own enum-prefix stripping is this same discipline showing up as runtime code: the proto enum's HANDLING_EVENT_TYPE_ prefix has to agree with the bare Java enum on both sides.</a:t>
             </a:r>
             <a:endParaRPr lang="en-US" dirty="0"/>
           </a:p>
@@ -3376,7 +3376,7 @@
           <a:p>
             <a:r>
               <a:rPr lang="en-US" dirty="0"/>
-              <a:t>Encoding (Protobuf vs. JSON) is a fixed, load-independent per-frame discount. Batching trades latency for fewer, larger frames. permessage-deflate is a per-stack default difference, not a universal win: Python's websockets library enables compression="deflate" by default; Quarkus WebSockets Next requires an explicit per-message-compression-supported=true to negotiate it at all. Size limits (max-message-size/max-frame-size) bound one frame independent of Chapter 12's queue depth. None of the four changes whether backpressure trips; they only change how much useful work a connection gets through before it does.</a:t>
+              <a:t>Encoding (Protobuf vs. JSON) is a fixed, load-independent per-frame discount. Batching trades latency for fewer, larger frames. permessage-deflate is a per-stack default difference, not a universal win: Python's websockets library enables compression="deflate" by default; Quarkus WebSockets Next requires an explicit per-message-compression-supported=true to negotiate it at all. Size limits (max-message-size/max-frame-size) bound one frame independent of the backpressure queue's depth. None of the four changes whether backpressure trips; they only change how much useful work a connection gets through before it does.</a:t>
             </a:r>
             <a:endParaRPr lang="en-US" dirty="0"/>
           </a:p>
@@ -3552,7 +3552,7 @@
           <a:p>
             <a:r>
               <a:rPr lang="en-US" dirty="0"/>
-              <a:t>A correction on this slide's own source: the actual application.properties for part5-performance sets neither property: that absence is the Ch20 finding being illustrated, not an oversight in this deck. A production deployment accepting attacker-reachable messages would want an explicit max-message-size/max-frame-size rather than relying on the framework's own ceiling; the chapter's k6/benchmark.js measured the compression-negotiation gap live (0% on Quarkus vs. 100% on Python across three runs with the identical client request).</a:t>
+              <a:t>A correction on this slide's own source: the actual application.properties for part5-performance sets neither property: that absence is what this chapter is illustrating, not an oversight in this deck. A production deployment accepting attacker-reachable messages would want an explicit max-message-size/max-frame-size rather than relying on the framework's own ceiling; the chapter's k6/benchmark.js measured the compression-negotiation gap live (0% on Quarkus vs. 100% on Python across three runs with the identical client request).</a:t>
             </a:r>
             <a:endParaRPr lang="en-US" dirty="0"/>
           </a:p>
@@ -3728,7 +3728,7 @@
           <a:p>
             <a:r>
               <a:rPr lang="en-US" dirty="0"/>
-              <a:t>Section 05 closes the implementation arc: the test pyramid this whole site's verify.sh corpus already is (Ch21), a symptom-to-tool map for live debugging (Ch22), and the one place Quarkus's auto-instrumentation stops and a manual span has to start (Ch23).</a:t>
+              <a:t>Section 05 closes the implementation arc: the test pyramid this whole site's verify.sh corpus already is (testing), a symptom-to-tool map for live debugging (debugging), and the one place Quarkus's auto-instrumentation stops and a manual span has to start (observability).</a:t>
             </a:r>
             <a:endParaRPr lang="en-US" dirty="0"/>
           </a:p>
@@ -3992,7 +3992,7 @@
           <a:p>
             <a:r>
               <a:rPr lang="en-US" dirty="0"/>
-              <a:t>Never upgrades at all → curl --include (a proxy likely stripped Connection: Upgrade). 101 then silence → DevTools Frames or websocat -t (check the auth gate from section 02, or a subprotocol mismatch). Wrong frame shape → the binary/text icon or websocat -b | xxd (an opcode mismatch, Ch19's negotiation gone wrong). Drops with no reason → the close_code itself: 4400/4290/4408/1008 each say why; 1006 means no code arrived at all. Dies under load → backpressure (4290) or the liveness sweep (4408) firing under pressure, both from section 02.</a:t>
+              <a:t>Never upgrades at all → curl --include (a proxy likely stripped Connection: Upgrade). 101 then silence → DevTools Frames or websocat -t (check the auth gate from section 02, or a subprotocol mismatch). Wrong frame shape → the binary/text icon or websocat -b | xxd (an opcode mismatch, the binary-Protobuf chapter's negotiation gone wrong). Drops with no reason → the close_code itself: 4400/4290/4408/1008 each say why; 1006 means no code arrived at all. Dies under load → backpressure (4290) or the liveness sweep (4408) firing under pressure, both from section 02.</a:t>
             </a:r>
             <a:endParaRPr lang="en-US" dirty="0"/>
           </a:p>
@@ -4080,7 +4080,7 @@
           <a:p>
             <a:r>
               <a:rPr lang="en-US" dirty="0"/>
-              <a:t>quarkus-opentelemetry auto-instruments the HTTP upgrade itself: every request gets a span with zero code. @WithSpan on @OnOpen adds a child span over the Multi it returns; the interceptor defers span.end() until that Multi completes, so the span covers the whole push, not just the synchronous part of the method body. Python has no native websockets auto-instrumentation at all: its equivalent span is entirely hand-written with the SDK tracer, no parent to attach to.</a:t>
+              <a:t>quarkus-opentelemetry auto-instruments the HTTP upgrade itself: every request gets a span with zero code. @WithSpan on @OnOpen adds a child span over the Multi it returns; the interceptor defers span.end() until that Multi completes, so the span covers the whole push rather than ending at the method's synchronous return. Python has no native websockets auto-instrumentation at all: its equivalent span is entirely hand-written with the SDK tracer, no parent to attach to.</a:t>
             </a:r>
             <a:endParaRPr lang="en-US" dirty="0"/>
           </a:p>
@@ -4696,7 +4696,7 @@
           <a:p>
             <a:r>
               <a:rPr lang="en-US" dirty="0"/>
-              <a:t>No special 'websocket' annotation exists for ingress-nginx: it detects the Connection: Upgrade / Upgrade: websocket request headers and proxies the upgrade through automatically; only the timeouts need raising. The affinity cookie is a sticky session so a reconnecting client (Ch15/Ch16) keeps landing on the same pod, moot with one replica per instance here, but it documents the production-shape intent. verify-minikube.sh's idle-hold step is the live proof the raised timeout does what it says: hold past 60s, assert a late frame still arrives.</a:t>
+              <a:t>No special 'websocket' annotation exists for ingress-nginx: it detects the Connection: Upgrade / Upgrade: websocket request headers and proxies the upgrade through automatically; only the timeouts need raising. The affinity cookie is a sticky session so a reconnecting client (stateless or Kafka-backed reconnect) keeps landing on the same pod, moot with one replica per instance here, but it documents the production-shape intent. verify-minikube.sh's idle-hold step is the live proof the raised timeout does what it says: hold past 60s, assert a late frame still arrives.</a:t>
             </a:r>
             <a:endParaRPr lang="en-US" dirty="0"/>
           </a:p>
@@ -5224,7 +5224,7 @@
           <a:p>
             <a:r>
               <a:rPr lang="en-US" dirty="0"/>
-              <a:t>Pulled directly from _plans/version-matrix.md, not restated from memory: check that file before citing a version from this deck. Repeat this hedge every time CRC's Kafka version comes up: 4.2.0 is a recorded step-back from 4.3.1 because the AMQ Streams operator doesn't yet support 4.3.x, and the CRC idle-hold proof is weaker than minikube's own run for that reason: the wire behavior Ch16/Ch18 exercise is identical on both versions, but the version pin itself is not.</a:t>
+              <a:t>Pulled directly from _plans/version-matrix.md, not restated from memory: check that file before citing a version from this deck. Repeat this hedge every time CRC's Kafka version comes up: 4.2.0 is a recorded step-back from 4.3.1 because the AMQ Streams operator doesn't yet support 4.3.x, and the CRC idle-hold proof is weaker than minikube's own run for that reason: the wire behavior the Kafka-backed-reconnect and scale-out chapters exercise is identical on both versions, but the version pin itself is not.</a:t>
             </a:r>
             <a:endParaRPr lang="en-US" dirty="0"/>
           </a:p>
@@ -5488,7 +5488,7 @@
           <a:p>
             <a:r>
               <a:rPr lang="en-US" dirty="0"/>
-              <a:t>Returning a Multi is the right call when WebSockets Next's own per-item write loop is enough; explicit connection.sendText is the right call the moment something needs to observe or bound each individual send: here, an outstanding-sends counter for Chapter 12's backpressure guard. Both run under the same @OnOpen-scoped subscription Quarkus itself manages; the guard's Javadoc is explicit about why a Uni this code subscribes to manually, rather than returns, would run its completion on a raw Vert.x thread after the connection's @SessionScoped context had already torn down.</a:t>
+              <a:t>Returning a Multi is the right call when WebSockets Next's own per-item write loop is enough; explicit connection.sendText is the right call the moment something needs to observe or bound each individual send: here, an outstanding-sends counter for the backpressure guard. Both run under the same @OnOpen-scoped subscription Quarkus itself manages; the guard's Javadoc is explicit about why a Uni this code subscribes to manually, rather than returns, would run its completion on a raw Vert.x thread after the connection's @SessionScoped context had already torn down.</a:t>
             </a:r>
             <a:endParaRPr lang="en-US" dirty="0"/>
           </a:p>
@@ -9893,7 +9893,7 @@
                 <a:ea typeface="Red Hat Text" pitchFamily="34" charset="-122"/>
                 <a:cs typeface="Red Hat Text" pitchFamily="34" charset="-120"/>
               </a:rPr>
-              <a:t>01: The Quarkus Endpoint: @OnOpen, Multi, the record, the contract test (Ch08)</a:t>
+              <a:t>01: The Quarkus Endpoint: @OnOpen, Multi, the record, the contract test</a:t>
             </a:r>
             <a:endParaRPr lang="en-US" sz="1700" dirty="0"/>
           </a:p>
@@ -9917,7 +9917,7 @@
                 <a:ea typeface="Red Hat Text" pitchFamily="34" charset="-122"/>
                 <a:cs typeface="Red Hat Text" pitchFamily="34" charset="-120"/>
               </a:rPr>
-              <a:t>02: Connection Concerns: backpressure, errors, heartbeats, auth (Ch12/13/14/17)</a:t>
+              <a:t>02: Connection Concerns: backpressure, errors, heartbeats, auth</a:t>
             </a:r>
             <a:endParaRPr lang="en-US" sz="1700" dirty="0"/>
           </a:p>
@@ -9941,7 +9941,7 @@
                 <a:ea typeface="Red Hat Text" pitchFamily="34" charset="-122"/>
                 <a:cs typeface="Red Hat Text" pitchFamily="34" charset="-120"/>
               </a:rPr>
-              <a:t>03: Reconnect and the Backplane: stateless, Kafka, Redis, scale-out (Ch15/16/18)</a:t>
+              <a:t>03: Reconnect and the Backplane: stateless, Kafka, Redis, scale-out</a:t>
             </a:r>
             <a:endParaRPr lang="en-US" sz="1700" dirty="0"/>
           </a:p>
@@ -9987,7 +9987,7 @@
                 <a:ea typeface="Red Hat Text" pitchFamily="34" charset="-122"/>
                 <a:cs typeface="Red Hat Text" pitchFamily="34" charset="-120"/>
               </a:rPr>
-              <a:t>04: Performance: Protobuf, field numbers, the throughput levers (Ch19/20)</a:t>
+              <a:t>04: Performance: Protobuf, field numbers, the throughput levers</a:t>
             </a:r>
             <a:endParaRPr lang="en-US" sz="1700" dirty="0"/>
           </a:p>
@@ -10011,7 +10011,7 @@
                 <a:ea typeface="Red Hat Text" pitchFamily="34" charset="-122"/>
                 <a:cs typeface="Red Hat Text" pitchFamily="34" charset="-120"/>
               </a:rPr>
-              <a:t>05: Testing, Debugging, Observability (Ch21/22/23)</a:t>
+              <a:t>05: Testing, Debugging, Observability</a:t>
             </a:r>
             <a:endParaRPr lang="en-US" sz="1700" dirty="0"/>
           </a:p>
@@ -17412,7 +17412,7 @@
                 <a:ea typeface="Red Hat Text" pitchFamily="34" charset="-122"/>
                 <a:cs typeface="Red Hat Text" pitchFamily="34" charset="-120"/>
               </a:rPr>
-              <a:t>Figure 20.2: four throughput levers, one shared ceiling: Chapter 12's bounded outbound queue governs every byte every lever above it produces.</a:t>
+              <a:t>Figure 20.2: four throughput levers, one shared ceiling: the bounded outbound queue governs every byte every lever above it produces.</a:t>
             </a:r>
             <a:endParaRPr lang="en-US" sz="1300" dirty="0"/>
           </a:p>
@@ -17806,7 +17806,7 @@
                 <a:ea typeface="Overpass" pitchFamily="34" charset="-122"/>
                 <a:cs typeface="Overpass" pitchFamily="34" charset="-120"/>
               </a:rPr>
-              <a:t>Illustrative Ch20 config: neither property is actually set in this example</a:t>
+              <a:t>Illustrative config: neither property is set in this example</a:t>
             </a:r>
             <a:endParaRPr lang="en-US" sz="2400" dirty="0"/>
           </a:p>
@@ -17912,7 +17912,7 @@
                 <a:ea typeface="Red Hat Mono" pitchFamily="34" charset="-122"/>
                 <a:cs typeface="Red Hat Mono" pitchFamily="34" charset="-120"/>
               </a:rPr>
-              <a:t># _docs/20-optimizing-throughput.md — Ch20's own config excerpt.
+              <a:t># _docs/20-optimizing-throughput.md: Ch20's own config excerpt.
 </a:t>
             </a:r>
             <a:pPr algn="l" indent="0" marL="0">
@@ -18150,7 +18150,7 @@
                 <a:ea typeface="Red Hat Text" pitchFamily="34" charset="-122"/>
                 <a:cs typeface="Red Hat Text" pitchFamily="34" charset="-120"/>
               </a:rPr>
-              <a:t>_docs/20-optimizing-throughput.md (Ch20): illustrative; not set in examples/part5-performance/quarkus/src/main/resources/application.properties</a:t>
+              <a:t>_docs/20-optimizing-throughput.md: illustrative; not set in examples/part5-performance/quarkus/src/main/resources/application.properties</a:t>
             </a:r>
             <a:endParaRPr lang="en-US" sz="1300" dirty="0"/>
           </a:p>
@@ -22069,7 +22069,7 @@
                 <a:ea typeface="Red Hat Mono" pitchFamily="34" charset="-122"/>
                 <a:cs typeface="Red Hat Mono" pitchFamily="34" charset="-120"/>
               </a:rPr>
-              <a:t># k8s/overlays/minikube/kustomization.yaml — retags images to the tag
+              <a:t># k8s/overlays/minikube/kustomization.yaml: retags images to the tag
 </a:t>
             </a:r>
             <a:pPr algn="l" indent="0" marL="0">
@@ -22285,7 +22285,7 @@
                 <a:ea typeface="Red Hat Mono" pitchFamily="34" charset="-122"/>
                 <a:cs typeface="Red Hat Mono" pitchFamily="34" charset="-120"/>
               </a:rPr>
-              <a:t># k8s/base/ingress.yaml — nginx's 60s proxy-read-timeout would otherwise
+              <a:t># k8s/base/ingress.yaml: nginx's 60s proxy-read-timeout would otherwise
 </a:t>
             </a:r>
             <a:pPr algn="l" indent="0" marL="0">
@@ -23275,7 +23275,7 @@
                 <a:ea typeface="Red Hat Text" pitchFamily="34" charset="-122"/>
                 <a:cs typeface="Red Hat Text" pitchFamily="34" charset="-120"/>
               </a:rPr>
-              <a:t>Ch25 keeps this pairing explicit rather than always starting every broker: a stateless-mode run with a Kafka container sitting idle nearby would be a confusing demo, not a safer one.</a:t>
+              <a:t>The Docker Compose chapter keeps this pairing explicit rather than always starting every broker: a stateless-mode run with a Kafka container sitting idle nearby would be a confusing demo, not a safer one.</a:t>
             </a:r>
             <a:endParaRPr lang="en-US" sz="1700" dirty="0"/>
           </a:p>
@@ -24117,7 +24117,7 @@
                 <a:ea typeface="Red Hat Text" pitchFamily="34" charset="-122"/>
                 <a:cs typeface="Red Hat Text" pitchFamily="34" charset="-120"/>
               </a:rPr>
-              <a:t>This is a benign race, not a bug to eliminate: the client-side contract is 'dedupe by eventId,' so a client that receives the same event twice over the wire (the seen.add race doesn't prevent delivery, only double-counting history) is already expected to tolerate it.</a:t>
+              <a:t>This is a benign, expected race: the client-side contract is 'dedupe by eventId,' so a client that receives the same event twice over the wire (the seen.add race doesn't prevent delivery, only double-counting history) is already expected to tolerate it.</a:t>
             </a:r>
             <a:endParaRPr lang="en-US" sz="1700" dirty="0"/>
           </a:p>
@@ -24425,7 +24425,7 @@
                 <a:ea typeface="Red Hat Mono" pitchFamily="34" charset="-122"/>
                 <a:cs typeface="Red Hat Mono" pitchFamily="34" charset="-120"/>
               </a:rPr>
-              <a:t>void sweep() { /* HeartbeatLivenessSweep — see section 02 */ }
+              <a:t>void sweep() { /* HeartbeatLivenessSweep, see section 02 */ }
 </a:t>
             </a:r>
             <a:pPr algn="l" indent="0" marL="0">
@@ -27277,7 +27277,7 @@
                 <a:ea typeface="Red Hat Mono" pitchFamily="34" charset="-122"/>
                 <a:cs typeface="Red Hat Mono" pitchFamily="34" charset="-120"/>
               </a:rPr>
-              <a:t>// part3 — HandlingEventWebSocket#onOpen: the Multi IS the wire
+              <a:t>// part3, HandlingEventWebSocket#onOpen: the Multi IS the wire
 </a:t>
             </a:r>
             <a:pPr algn="l" indent="0" marL="0">
@@ -27385,7 +27385,7 @@
                 <a:ea typeface="Red Hat Mono" pitchFamily="34" charset="-122"/>
                 <a:cs typeface="Red Hat Mono" pitchFamily="34" charset="-120"/>
               </a:rPr>
-              <a:t>// part4-connection — OutboundBackpressureGuard#sendOne: explicit sendText,
+              <a:t>// part4-connection, OutboundBackpressureGuard#sendOne: explicit sendText,
 </a:t>
             </a:r>
             <a:pPr algn="l" indent="0" marL="0">
